--- a/seminario/Selection Sort (Ordenação por Seleção).pptx
+++ b/seminario/Selection Sort (Ordenação por Seleção).pptx
@@ -114,6 +114,11 @@
       </a:defRPr>
     </a:lvl9pPr>
   </p:defaultTextStyle>
+  <p:extLst>
+    <p:ext uri="{EFAFB233-063F-42B5-8137-9DF3F51BA10A}">
+      <p15:sldGuideLst xmlns:p15="http://schemas.microsoft.com/office/powerpoint/2012/main"/>
+    </p:ext>
+  </p:extLst>
 </p:presentation>
 </file>
 
@@ -212,7 +217,7 @@
           <a:effectLst/>
           <a:extLst>
             <a:ext uri="{91240B29-F687-4f45-9708-019B960494DF}">
-              <a14:hiddenLine xmlns:a14="http://schemas.microsoft.com/office/drawing/2010/main" xmlns="" w="9525">
+              <a14:hiddenLine xmlns="" xmlns:a14="http://schemas.microsoft.com/office/drawing/2010/main" w="9525">
                 <a:solidFill>
                   <a:srgbClr val="000000"/>
                 </a:solidFill>
@@ -237,6 +242,13 @@
             <a:schemeClr val="lt1"/>
           </a:fontRef>
         </p:style>
+        <p:txBody>
+          <a:bodyPr/>
+          <a:lstStyle/>
+          <a:p>
+            <a:endParaRPr lang="pt-BR"/>
+          </a:p>
+        </p:txBody>
       </p:sp>
       <p:sp>
         <p:nvSpPr>
@@ -404,7 +416,7 @@
           <a:p>
             <a:fld id="{23258D85-DEA6-4CC4-9F2A-BB44C5CD8F0A}" type="datetimeFigureOut">
               <a:rPr lang="pt-BR" smtClean="0"/>
-              <a:t>10/05/2026</a:t>
+              <a:t>11/05/2026</a:t>
             </a:fld>
             <a:endParaRPr lang="pt-BR"/>
           </a:p>
@@ -722,7 +734,7 @@
           <a:p>
             <a:fld id="{23258D85-DEA6-4CC4-9F2A-BB44C5CD8F0A}" type="datetimeFigureOut">
               <a:rPr lang="pt-BR" smtClean="0"/>
-              <a:t>10/05/2026</a:t>
+              <a:t>11/05/2026</a:t>
             </a:fld>
             <a:endParaRPr lang="pt-BR"/>
           </a:p>
@@ -1210,7 +1222,7 @@
           <a:p>
             <a:fld id="{23258D85-DEA6-4CC4-9F2A-BB44C5CD8F0A}" type="datetimeFigureOut">
               <a:rPr lang="pt-BR" smtClean="0"/>
-              <a:t>10/05/2026</a:t>
+              <a:t>11/05/2026</a:t>
             </a:fld>
             <a:endParaRPr lang="pt-BR"/>
           </a:p>
@@ -1579,7 +1591,7 @@
           <a:p>
             <a:fld id="{23258D85-DEA6-4CC4-9F2A-BB44C5CD8F0A}" type="datetimeFigureOut">
               <a:rPr lang="pt-BR" smtClean="0"/>
-              <a:t>10/05/2026</a:t>
+              <a:t>11/05/2026</a:t>
             </a:fld>
             <a:endParaRPr lang="pt-BR"/>
           </a:p>
@@ -1734,7 +1746,7 @@
           <a:ln/>
           <a:extLst>
             <a:ext uri="{91240B29-F687-4f45-9708-019B960494DF}">
-              <a14:hiddenLine xmlns:a14="http://schemas.microsoft.com/office/drawing/2010/main" xmlns="" w="9525">
+              <a14:hiddenLine xmlns="" xmlns:a14="http://schemas.microsoft.com/office/drawing/2010/main" w="9525">
                 <a:solidFill>
                   <a:srgbClr val="000000"/>
                 </a:solidFill>
@@ -1852,7 +1864,7 @@
           <a:p>
             <a:fld id="{23258D85-DEA6-4CC4-9F2A-BB44C5CD8F0A}" type="datetimeFigureOut">
               <a:rPr lang="pt-BR" smtClean="0"/>
-              <a:t>10/05/2026</a:t>
+              <a:t>11/05/2026</a:t>
             </a:fld>
             <a:endParaRPr lang="pt-BR"/>
           </a:p>
@@ -2009,7 +2021,7 @@
           <a:ln/>
           <a:extLst>
             <a:ext uri="{91240B29-F687-4f45-9708-019B960494DF}">
-              <a14:hiddenLine xmlns:a14="http://schemas.microsoft.com/office/drawing/2010/main" xmlns="" w="9525">
+              <a14:hiddenLine xmlns="" xmlns:a14="http://schemas.microsoft.com/office/drawing/2010/main" w="9525">
                 <a:solidFill>
                   <a:srgbClr val="000000"/>
                 </a:solidFill>
@@ -2137,7 +2149,7 @@
           <a:p>
             <a:fld id="{23258D85-DEA6-4CC4-9F2A-BB44C5CD8F0A}" type="datetimeFigureOut">
               <a:rPr lang="pt-BR" smtClean="0"/>
-              <a:t>10/05/2026</a:t>
+              <a:t>11/05/2026</a:t>
             </a:fld>
             <a:endParaRPr lang="pt-BR"/>
           </a:p>
@@ -2292,7 +2304,7 @@
           <a:ln/>
           <a:extLst>
             <a:ext uri="{91240B29-F687-4f45-9708-019B960494DF}">
-              <a14:hiddenLine xmlns:a14="http://schemas.microsoft.com/office/drawing/2010/main" xmlns="" w="9525">
+              <a14:hiddenLine xmlns="" xmlns:a14="http://schemas.microsoft.com/office/drawing/2010/main" w="9525">
                 <a:solidFill>
                   <a:srgbClr val="000000"/>
                 </a:solidFill>
@@ -2420,7 +2432,7 @@
           <a:p>
             <a:fld id="{23258D85-DEA6-4CC4-9F2A-BB44C5CD8F0A}" type="datetimeFigureOut">
               <a:rPr lang="pt-BR" smtClean="0"/>
-              <a:t>10/05/2026</a:t>
+              <a:t>11/05/2026</a:t>
             </a:fld>
             <a:endParaRPr lang="pt-BR"/>
           </a:p>
@@ -2763,7 +2775,7 @@
           <a:p>
             <a:fld id="{23258D85-DEA6-4CC4-9F2A-BB44C5CD8F0A}" type="datetimeFigureOut">
               <a:rPr lang="pt-BR" smtClean="0"/>
-              <a:t>10/05/2026</a:t>
+              <a:t>11/05/2026</a:t>
             </a:fld>
             <a:endParaRPr lang="pt-BR"/>
           </a:p>
@@ -2918,7 +2930,7 @@
           <a:ln/>
           <a:extLst>
             <a:ext uri="{91240B29-F687-4f45-9708-019B960494DF}">
-              <a14:hiddenLine xmlns:a14="http://schemas.microsoft.com/office/drawing/2010/main" xmlns="" w="9525">
+              <a14:hiddenLine xmlns="" xmlns:a14="http://schemas.microsoft.com/office/drawing/2010/main" w="9525">
                 <a:solidFill>
                   <a:srgbClr val="000000"/>
                 </a:solidFill>
@@ -3102,7 +3114,7 @@
           <a:p>
             <a:fld id="{23258D85-DEA6-4CC4-9F2A-BB44C5CD8F0A}" type="datetimeFigureOut">
               <a:rPr lang="pt-BR" smtClean="0"/>
-              <a:t>10/05/2026</a:t>
+              <a:t>11/05/2026</a:t>
             </a:fld>
             <a:endParaRPr lang="pt-BR"/>
           </a:p>
@@ -3257,7 +3269,7 @@
           <a:ln/>
           <a:extLst>
             <a:ext uri="{91240B29-F687-4f45-9708-019B960494DF}">
-              <a14:hiddenLine xmlns:a14="http://schemas.microsoft.com/office/drawing/2010/main" xmlns="" w="9525">
+              <a14:hiddenLine xmlns="" xmlns:a14="http://schemas.microsoft.com/office/drawing/2010/main" w="9525">
                 <a:solidFill>
                   <a:srgbClr val="000000"/>
                 </a:solidFill>
@@ -3579,7 +3591,7 @@
           <a:p>
             <a:fld id="{23258D85-DEA6-4CC4-9F2A-BB44C5CD8F0A}" type="datetimeFigureOut">
               <a:rPr lang="pt-BR" smtClean="0"/>
-              <a:t>10/05/2026</a:t>
+              <a:t>11/05/2026</a:t>
             </a:fld>
             <a:endParaRPr lang="pt-BR"/>
           </a:p>
@@ -3734,7 +3746,7 @@
           <a:ln/>
           <a:extLst>
             <a:ext uri="{91240B29-F687-4f45-9708-019B960494DF}">
-              <a14:hiddenLine xmlns:a14="http://schemas.microsoft.com/office/drawing/2010/main" xmlns="" w="9525">
+              <a14:hiddenLine xmlns="" xmlns:a14="http://schemas.microsoft.com/office/drawing/2010/main" w="9525">
                 <a:solidFill>
                   <a:srgbClr val="000000"/>
                 </a:solidFill>
@@ -3800,7 +3812,7 @@
           <a:p>
             <a:fld id="{23258D85-DEA6-4CC4-9F2A-BB44C5CD8F0A}" type="datetimeFigureOut">
               <a:rPr lang="pt-BR" smtClean="0"/>
-              <a:t>10/05/2026</a:t>
+              <a:t>11/05/2026</a:t>
             </a:fld>
             <a:endParaRPr lang="pt-BR"/>
           </a:p>
@@ -3895,7 +3907,7 @@
           <a:p>
             <a:fld id="{23258D85-DEA6-4CC4-9F2A-BB44C5CD8F0A}" type="datetimeFigureOut">
               <a:rPr lang="pt-BR" smtClean="0"/>
-              <a:t>10/05/2026</a:t>
+              <a:t>11/05/2026</a:t>
             </a:fld>
             <a:endParaRPr lang="pt-BR"/>
           </a:p>
@@ -4163,7 +4175,7 @@
           <a:ln/>
           <a:extLst>
             <a:ext uri="{91240B29-F687-4f45-9708-019B960494DF}">
-              <a14:hiddenLine xmlns:a14="http://schemas.microsoft.com/office/drawing/2010/main" xmlns="" w="9525">
+              <a14:hiddenLine xmlns="" xmlns:a14="http://schemas.microsoft.com/office/drawing/2010/main" w="9525">
                 <a:solidFill>
                   <a:srgbClr val="000000"/>
                 </a:solidFill>
@@ -4362,7 +4374,7 @@
           <a:p>
             <a:fld id="{23258D85-DEA6-4CC4-9F2A-BB44C5CD8F0A}" type="datetimeFigureOut">
               <a:rPr lang="pt-BR" smtClean="0"/>
-              <a:t>10/05/2026</a:t>
+              <a:t>11/05/2026</a:t>
             </a:fld>
             <a:endParaRPr lang="pt-BR"/>
           </a:p>
@@ -4675,7 +4687,7 @@
           <a:p>
             <a:fld id="{23258D85-DEA6-4CC4-9F2A-BB44C5CD8F0A}" type="datetimeFigureOut">
               <a:rPr lang="pt-BR" smtClean="0"/>
-              <a:t>10/05/2026</a:t>
+              <a:t>11/05/2026</a:t>
             </a:fld>
             <a:endParaRPr lang="pt-BR"/>
           </a:p>
@@ -4945,7 +4957,7 @@
           <a:p>
             <a:fld id="{23258D85-DEA6-4CC4-9F2A-BB44C5CD8F0A}" type="datetimeFigureOut">
               <a:rPr lang="pt-BR" smtClean="0"/>
-              <a:t>10/05/2026</a:t>
+              <a:t>11/05/2026</a:t>
             </a:fld>
             <a:endParaRPr lang="pt-BR"/>
           </a:p>
@@ -5479,7 +5491,7 @@
           <a:p>
             <a:r>
               <a:rPr lang="pt-BR" sz="1400" dirty="0"/>
-              <a:t>Umberto</a:t>
+              <a:t>Humberto Soares</a:t>
             </a:r>
           </a:p>
         </p:txBody>
